--- a/pptx-output/08-advanced-skills-agents-and-plugins.pptx
+++ b/pptx-output/08-advanced-skills-agents-and-plugins.pptx
@@ -854,6 +854,11 @@
           <a:p>
             <a:r>
               <a:t>`references/skills-agents-and-plugins-differences.md`</a:t>
+            </a:r>
+          </a:p>
+          <a:p>
+            <a:r>
+              <a:t>`references/github-copilot-reimagine-overview.md`</a:t>
             </a:r>
           </a:p>
           <a:p>
@@ -7140,7 +7145,7 @@
         <p:spPr>
           <a:xfrm>
             <a:off x="8046720" y="1463040"/>
-            <a:ext cx="3840480" cy="2926080"/>
+            <a:ext cx="3840480" cy="3429000"/>
           </a:xfrm>
           <a:prstGeom prst="roundRect">
             <a:avLst/>
@@ -7219,7 +7224,7 @@
         <p:spPr>
           <a:xfrm>
             <a:off x="8229600" y="1828800"/>
-            <a:ext cx="3474720" cy="2468880"/>
+            <a:ext cx="3474720" cy="2971800"/>
           </a:xfrm>
           <a:prstGeom prst="rect">
             <a:avLst/>
@@ -7261,6 +7266,22 @@
                 <a:latin typeface="Segoe UI"/>
               </a:rPr>
               <a:t>`references/skills-agents-and-plugins-differences.md`</a:t>
+            </a:r>
+          </a:p>
+          <a:p>
+            <a:pPr>
+              <a:spcAft>
+                <a:spcPts val="400"/>
+              </a:spcAft>
+            </a:pPr>
+            <a:r>
+              <a:rPr sz="1100" i="1">
+                <a:solidFill>
+                  <a:srgbClr val="5D6D7E"/>
+                </a:solidFill>
+                <a:latin typeface="Segoe UI"/>
+              </a:rPr>
+              <a:t>`references/github-copilot-reimagine-overview.md`</a:t>
             </a:r>
           </a:p>
           <a:p>
